--- a/[05.26] Turtlebot & VMware.pptx
+++ b/[05.26] Turtlebot & VMware.pptx
@@ -292,7 +292,7 @@
                 </a:solidFill>
               </a:rPr>
               <a:pPr/>
-              <a:t>2021-05-22</a:t>
+              <a:t>2021-05-24</a:t>
             </a:fld>
             <a:endParaRPr lang="ko-KR" altLang="en-US">
               <a:solidFill>
@@ -522,7 +522,7 @@
                 </a:solidFill>
               </a:rPr>
               <a:pPr/>
-              <a:t>2021-05-22</a:t>
+              <a:t>2021-05-24</a:t>
             </a:fld>
             <a:endParaRPr lang="ko-KR" altLang="en-US">
               <a:solidFill>
@@ -762,7 +762,7 @@
                 </a:solidFill>
               </a:rPr>
               <a:pPr/>
-              <a:t>2021-05-22</a:t>
+              <a:t>2021-05-24</a:t>
             </a:fld>
             <a:endParaRPr lang="ko-KR" altLang="en-US">
               <a:solidFill>
@@ -992,7 +992,7 @@
                 </a:solidFill>
               </a:rPr>
               <a:pPr/>
-              <a:t>2021-05-22</a:t>
+              <a:t>2021-05-24</a:t>
             </a:fld>
             <a:endParaRPr lang="ko-KR" altLang="en-US">
               <a:solidFill>
@@ -1299,7 +1299,7 @@
                 </a:solidFill>
               </a:rPr>
               <a:pPr/>
-              <a:t>2021-05-22</a:t>
+              <a:t>2021-05-24</a:t>
             </a:fld>
             <a:endParaRPr lang="ko-KR" altLang="en-US">
               <a:solidFill>
@@ -1596,7 +1596,7 @@
                 </a:solidFill>
               </a:rPr>
               <a:pPr/>
-              <a:t>2021-05-22</a:t>
+              <a:t>2021-05-24</a:t>
             </a:fld>
             <a:endParaRPr lang="ko-KR" altLang="en-US">
               <a:solidFill>
@@ -2040,7 +2040,7 @@
                 </a:solidFill>
               </a:rPr>
               <a:pPr/>
-              <a:t>2021-05-22</a:t>
+              <a:t>2021-05-24</a:t>
             </a:fld>
             <a:endParaRPr lang="ko-KR" altLang="en-US">
               <a:solidFill>
@@ -2213,7 +2213,7 @@
                 </a:solidFill>
               </a:rPr>
               <a:pPr/>
-              <a:t>2021-05-22</a:t>
+              <a:t>2021-05-24</a:t>
             </a:fld>
             <a:endParaRPr lang="ko-KR" altLang="en-US">
               <a:solidFill>
@@ -2358,7 +2358,7 @@
                 </a:solidFill>
               </a:rPr>
               <a:pPr/>
-              <a:t>2021-05-22</a:t>
+              <a:t>2021-05-24</a:t>
             </a:fld>
             <a:endParaRPr lang="ko-KR" altLang="en-US">
               <a:solidFill>
@@ -2701,7 +2701,7 @@
                 </a:solidFill>
               </a:rPr>
               <a:pPr/>
-              <a:t>2021-05-22</a:t>
+              <a:t>2021-05-24</a:t>
             </a:fld>
             <a:endParaRPr lang="ko-KR" altLang="en-US">
               <a:solidFill>
@@ -3021,7 +3021,7 @@
                 </a:solidFill>
               </a:rPr>
               <a:pPr/>
-              <a:t>2021-05-22</a:t>
+              <a:t>2021-05-24</a:t>
             </a:fld>
             <a:endParaRPr lang="ko-KR" altLang="en-US">
               <a:solidFill>
@@ -3294,7 +3294,7 @@
                 </a:solidFill>
               </a:rPr>
               <a:pPr/>
-              <a:t>2021-05-22</a:t>
+              <a:t>2021-05-24</a:t>
             </a:fld>
             <a:endParaRPr lang="ko-KR" altLang="en-US">
               <a:solidFill>
@@ -11709,8 +11709,21 @@
             </a:r>
             <a:r>
               <a:rPr lang="ko-KR" altLang="en-US" sz="2000" b="1" dirty="0"/>
-              <a:t>설치과정</a:t>
-            </a:r>
+              <a:t>설치과정 </a:t>
+            </a:r>
+            <a:r>
+              <a:rPr lang="en-US" altLang="ko-KR" sz="2000" b="1" dirty="0"/>
+              <a:t>– </a:t>
+            </a:r>
+            <a:r>
+              <a:rPr lang="en-US" altLang="ko-KR" sz="2000" b="1"/>
+              <a:t>Ros melodic </a:t>
+            </a:r>
+            <a:r>
+              <a:rPr lang="ko-KR" altLang="en-US" sz="2000" b="1"/>
+              <a:t>설치</a:t>
+            </a:r>
+            <a:endParaRPr lang="ko-KR" altLang="en-US" sz="2000" b="1" dirty="0"/>
           </a:p>
         </p:txBody>
       </p:sp>
